--- a/Deliveries/Capstone Final Video_Bryce Rooney - Copy.pptx
+++ b/Deliveries/Capstone Final Video_Bryce Rooney - Copy.pptx
@@ -1418,8 +1418,163 @@
           <a:p>
             <a:r>
               <a:rPr lang="en-US" dirty="0"/>
-              <a:t>SF7 125k example</a:t>
+              <a:t>SF7 500k example</a:t>
             </a:r>
+          </a:p>
+          <a:p>
+            <a:endParaRPr lang="en-US" dirty="0"/>
+          </a:p>
+          <a:p>
+            <a:r>
+              <a:rPr lang="en-US" sz="1200" b="0" i="0" u="none" strike="noStrike" kern="1200" dirty="0">
+                <a:solidFill>
+                  <a:schemeClr val="tx1"/>
+                </a:solidFill>
+                <a:effectLst/>
+                <a:latin typeface="+mn-lt"/>
+                <a:ea typeface="+mn-ea"/>
+                <a:cs typeface="+mn-cs"/>
+              </a:rPr>
+              <a:t>RFN resolution of attenuation steps at 2nm increments</a:t>
+            </a:r>
+            <a:r>
+              <a:rPr lang="en-US" dirty="0">
+                <a:effectLst/>
+              </a:rPr>
+              <a:t> </a:t>
+            </a:r>
+          </a:p>
+          <a:p>
+            <a:r>
+              <a:rPr lang="en-US" sz="1200" b="0" i="0" u="none" strike="noStrike" kern="1200" dirty="0">
+                <a:solidFill>
+                  <a:schemeClr val="tx1"/>
+                </a:solidFill>
+                <a:effectLst/>
+                <a:latin typeface="+mn-lt"/>
+                <a:ea typeface="+mn-ea"/>
+                <a:cs typeface="+mn-cs"/>
+              </a:rPr>
+              <a:t>RFN handling jam-1 and SNR seen at 1-2</a:t>
+            </a:r>
+            <a:r>
+              <a:rPr lang="en-US" dirty="0">
+                <a:effectLst/>
+              </a:rPr>
+              <a:t> </a:t>
+            </a:r>
+          </a:p>
+          <a:p>
+            <a:endParaRPr lang="en-US" dirty="0">
+              <a:effectLst/>
+            </a:endParaRPr>
+          </a:p>
+          <a:p>
+            <a:r>
+              <a:rPr lang="en-US" sz="1200" b="0" i="0" u="none" strike="noStrike" kern="1200" dirty="0">
+                <a:solidFill>
+                  <a:schemeClr val="tx1"/>
+                </a:solidFill>
+                <a:effectLst/>
+                <a:latin typeface="+mn-lt"/>
+                <a:ea typeface="+mn-ea"/>
+                <a:cs typeface="+mn-cs"/>
+              </a:rPr>
+              <a:t>hardcoded scripts only 60nm movement - too short for LoRa?</a:t>
+            </a:r>
+            <a:r>
+              <a:rPr lang="en-US" dirty="0">
+                <a:effectLst/>
+              </a:rPr>
+              <a:t> </a:t>
+            </a:r>
+          </a:p>
+          <a:p>
+            <a:endParaRPr lang="en-US" dirty="0">
+              <a:effectLst/>
+            </a:endParaRPr>
+          </a:p>
+          <a:p>
+            <a:r>
+              <a:rPr lang="en-US" sz="1200" b="0" i="0" u="none" strike="noStrike" kern="1200" dirty="0">
+                <a:solidFill>
+                  <a:schemeClr val="tx1"/>
+                </a:solidFill>
+                <a:effectLst/>
+                <a:latin typeface="+mn-lt"/>
+                <a:ea typeface="+mn-ea"/>
+                <a:cs typeface="+mn-cs"/>
+              </a:rPr>
+              <a:t>emulated jammer negligible, but legal and easily obtained</a:t>
+            </a:r>
+            <a:r>
+              <a:rPr lang="en-US" dirty="0">
+                <a:effectLst/>
+              </a:rPr>
+              <a:t> </a:t>
+            </a:r>
+          </a:p>
+          <a:p>
+            <a:endParaRPr lang="en-US" dirty="0">
+              <a:effectLst/>
+            </a:endParaRPr>
+          </a:p>
+          <a:p>
+            <a:r>
+              <a:rPr lang="en-US" sz="1200" b="0" i="0" u="none" strike="noStrike" kern="1200" dirty="0">
+                <a:solidFill>
+                  <a:schemeClr val="tx1"/>
+                </a:solidFill>
+                <a:effectLst/>
+                <a:latin typeface="+mn-lt"/>
+                <a:ea typeface="+mn-ea"/>
+                <a:cs typeface="+mn-cs"/>
+              </a:rPr>
+              <a:t>packet vs </a:t>
+            </a:r>
+            <a:r>
+              <a:rPr lang="en-US" sz="1200" b="0" i="0" u="none" strike="noStrike" kern="1200" dirty="0" err="1">
+                <a:solidFill>
+                  <a:schemeClr val="tx1"/>
+                </a:solidFill>
+                <a:effectLst/>
+                <a:latin typeface="+mn-lt"/>
+                <a:ea typeface="+mn-ea"/>
+                <a:cs typeface="+mn-cs"/>
+              </a:rPr>
+              <a:t>ber</a:t>
+            </a:r>
+            <a:r>
+              <a:rPr lang="en-US" sz="1200" b="0" i="0" u="none" strike="noStrike" kern="1200" dirty="0">
+                <a:solidFill>
+                  <a:schemeClr val="tx1"/>
+                </a:solidFill>
+                <a:effectLst/>
+                <a:latin typeface="+mn-lt"/>
+                <a:ea typeface="+mn-ea"/>
+                <a:cs typeface="+mn-cs"/>
+              </a:rPr>
+              <a:t> </a:t>
+            </a:r>
+            <a:r>
+              <a:rPr lang="en-US" sz="1200" b="0" i="0" u="none" strike="noStrike" kern="1200" dirty="0" err="1">
+                <a:solidFill>
+                  <a:schemeClr val="tx1"/>
+                </a:solidFill>
+                <a:effectLst/>
+                <a:latin typeface="+mn-lt"/>
+                <a:ea typeface="+mn-ea"/>
+                <a:cs typeface="+mn-cs"/>
+              </a:rPr>
+              <a:t>goodut</a:t>
+            </a:r>
+            <a:r>
+              <a:rPr lang="en-US" dirty="0">
+                <a:effectLst/>
+              </a:rPr>
+              <a:t> </a:t>
+            </a:r>
+            <a:endParaRPr lang="en-US" dirty="0"/>
           </a:p>
         </p:txBody>
       </p:sp>
@@ -7853,7 +8008,7 @@
         </p:nvSpPr>
         <p:spPr>
           <a:xfrm>
-            <a:off x="6280862" y="2650690"/>
+            <a:off x="6444712" y="2212636"/>
             <a:ext cx="5368838" cy="1653721"/>
           </a:xfrm>
           <a:prstGeom prst="rect">
@@ -7862,7 +8017,7 @@
         </p:spPr>
         <p:txBody>
           <a:bodyPr vert="horz" lIns="91440" tIns="45720" rIns="91440" bIns="45720" rtlCol="0">
-            <a:normAutofit/>
+            <a:normAutofit fontScale="85000" lnSpcReduction="20000"/>
           </a:bodyPr>
           <a:lstStyle>
             <a:lvl1pPr marL="228600" indent="-228600" algn="l" defTabSz="914400" rtl="0" eaLnBrk="1" latinLnBrk="0" hangingPunct="1">
@@ -8036,7 +8191,7 @@
                   <a:schemeClr val="bg1"/>
                 </a:solidFill>
               </a:rPr>
-              <a:t>Radiometry (energy-based detection)</a:t>
+              <a:t>Varying validity of results</a:t>
             </a:r>
           </a:p>
           <a:p>
@@ -8047,7 +8202,7 @@
                   <a:schemeClr val="bg1"/>
                 </a:solidFill>
               </a:rPr>
-              <a:t>Empirical Probability Calculations (MATLAB)</a:t>
+              <a:t>Recursive improvements to test and codebase required</a:t>
             </a:r>
           </a:p>
           <a:p>
@@ -8058,18 +8213,51 @@
                   <a:schemeClr val="bg1"/>
                 </a:solidFill>
               </a:rPr>
-              <a:t>Receiver Operating Characteristic (ROC) Curve</a:t>
+              <a:t>Deficiencies/limitations:</a:t>
             </a:r>
           </a:p>
           <a:p>
-            <a:pPr lvl="1"/>
+            <a:pPr lvl="2"/>
             <a:r>
-              <a:rPr lang="en-US" sz="1800" dirty="0">
+              <a:rPr lang="en-US" sz="1400" dirty="0">
                 <a:solidFill>
                   <a:schemeClr val="bg1"/>
                 </a:solidFill>
               </a:rPr>
-              <a:t>Slash curve</a:t>
+              <a:t>Equipment </a:t>
+            </a:r>
+          </a:p>
+          <a:p>
+            <a:pPr lvl="2"/>
+            <a:r>
+              <a:rPr lang="en-US" sz="1400" dirty="0">
+                <a:solidFill>
+                  <a:schemeClr val="bg1"/>
+                </a:solidFill>
+              </a:rPr>
+              <a:t>Scripts</a:t>
+            </a:r>
+          </a:p>
+          <a:p>
+            <a:pPr lvl="2"/>
+            <a:r>
+              <a:rPr lang="en-US" sz="1400" dirty="0">
+                <a:solidFill>
+                  <a:schemeClr val="bg1"/>
+                </a:solidFill>
+              </a:rPr>
+              <a:t>Codebase</a:t>
+            </a:r>
+          </a:p>
+          <a:p>
+            <a:pPr lvl="2"/>
+            <a:r>
+              <a:rPr lang="en-US" sz="1400" dirty="0">
+                <a:solidFill>
+                  <a:schemeClr val="bg1"/>
+                </a:solidFill>
+              </a:rPr>
+              <a:t>Scenario</a:t>
             </a:r>
           </a:p>
           <a:p>
@@ -8296,6 +8484,333 @@
               </a:defRPr>
             </a:lvl9pPr>
           </a:lstStyle>
+          <a:p>
+            <a:pPr marL="457200" lvl="1" indent="0">
+              <a:buFont typeface="Arial" panose="020B0604020202020204" pitchFamily="34" charset="0"/>
+              <a:buNone/>
+            </a:pPr>
+            <a:endParaRPr lang="en-US" sz="2000" dirty="0">
+              <a:solidFill>
+                <a:schemeClr val="bg1"/>
+              </a:solidFill>
+            </a:endParaRPr>
+          </a:p>
+        </p:txBody>
+      </p:sp>
+      <p:pic>
+        <p:nvPicPr>
+          <p:cNvPr id="4" name="Picture 3">
+            <a:extLst>
+              <a:ext uri="{FF2B5EF4-FFF2-40B4-BE49-F238E27FC236}">
+                <a16:creationId xmlns:a16="http://schemas.microsoft.com/office/drawing/2014/main" id="{437FA617-60C8-C26F-7C1E-E12FD928F03A}"/>
+              </a:ext>
+            </a:extLst>
+          </p:cNvPr>
+          <p:cNvPicPr>
+            <a:picLocks noChangeAspect="1"/>
+          </p:cNvPicPr>
+          <p:nvPr/>
+        </p:nvPicPr>
+        <p:blipFill>
+          <a:blip r:embed="rId3"/>
+          <a:stretch>
+            <a:fillRect/>
+          </a:stretch>
+        </p:blipFill>
+        <p:spPr>
+          <a:xfrm>
+            <a:off x="302788" y="2122014"/>
+            <a:ext cx="4477924" cy="2137611"/>
+          </a:xfrm>
+          <a:prstGeom prst="rect">
+            <a:avLst/>
+          </a:prstGeom>
+        </p:spPr>
+      </p:pic>
+      <p:pic>
+        <p:nvPicPr>
+          <p:cNvPr id="6" name="Picture 5">
+            <a:extLst>
+              <a:ext uri="{FF2B5EF4-FFF2-40B4-BE49-F238E27FC236}">
+                <a16:creationId xmlns:a16="http://schemas.microsoft.com/office/drawing/2014/main" id="{DB29E472-8069-692F-FD55-B3F94A785E92}"/>
+              </a:ext>
+            </a:extLst>
+          </p:cNvPr>
+          <p:cNvPicPr>
+            <a:picLocks noChangeAspect="1"/>
+          </p:cNvPicPr>
+          <p:nvPr/>
+        </p:nvPicPr>
+        <p:blipFill>
+          <a:blip r:embed="rId4"/>
+          <a:stretch>
+            <a:fillRect/>
+          </a:stretch>
+        </p:blipFill>
+        <p:spPr>
+          <a:xfrm>
+            <a:off x="302788" y="4330077"/>
+            <a:ext cx="4477924" cy="2187893"/>
+          </a:xfrm>
+          <a:prstGeom prst="rect">
+            <a:avLst/>
+          </a:prstGeom>
+        </p:spPr>
+      </p:pic>
+      <p:pic>
+        <p:nvPicPr>
+          <p:cNvPr id="9" name="Picture 8">
+            <a:extLst>
+              <a:ext uri="{FF2B5EF4-FFF2-40B4-BE49-F238E27FC236}">
+                <a16:creationId xmlns:a16="http://schemas.microsoft.com/office/drawing/2014/main" id="{C40FA69E-CAE0-8FFF-71A2-E30C0DC528BA}"/>
+              </a:ext>
+            </a:extLst>
+          </p:cNvPr>
+          <p:cNvPicPr>
+            <a:picLocks noChangeAspect="1"/>
+          </p:cNvPicPr>
+          <p:nvPr/>
+        </p:nvPicPr>
+        <p:blipFill>
+          <a:blip r:embed="rId5"/>
+          <a:stretch>
+            <a:fillRect/>
+          </a:stretch>
+        </p:blipFill>
+        <p:spPr>
+          <a:xfrm>
+            <a:off x="4906919" y="4330078"/>
+            <a:ext cx="4490224" cy="2193780"/>
+          </a:xfrm>
+          <a:prstGeom prst="rect">
+            <a:avLst/>
+          </a:prstGeom>
+        </p:spPr>
+      </p:pic>
+      <p:sp>
+        <p:nvSpPr>
+          <p:cNvPr id="11" name="Content Placeholder 2">
+            <a:extLst>
+              <a:ext uri="{FF2B5EF4-FFF2-40B4-BE49-F238E27FC236}">
+                <a16:creationId xmlns:a16="http://schemas.microsoft.com/office/drawing/2014/main" id="{E2097202-8DDB-7941-4917-45A78BBB9B26}"/>
+              </a:ext>
+            </a:extLst>
+          </p:cNvPr>
+          <p:cNvSpPr txBox="1">
+            <a:spLocks/>
+          </p:cNvSpPr>
+          <p:nvPr/>
+        </p:nvSpPr>
+        <p:spPr>
+          <a:xfrm>
+            <a:off x="4374617" y="4023438"/>
+            <a:ext cx="4048635" cy="434688"/>
+          </a:xfrm>
+          <a:prstGeom prst="rect">
+            <a:avLst/>
+          </a:prstGeom>
+        </p:spPr>
+        <p:txBody>
+          <a:bodyPr vert="horz" lIns="91440" tIns="45720" rIns="91440" bIns="45720" rtlCol="0">
+            <a:normAutofit/>
+          </a:bodyPr>
+          <a:lstStyle>
+            <a:lvl1pPr marL="228600" indent="-228600" algn="l" defTabSz="914400" rtl="0" eaLnBrk="1" latinLnBrk="0" hangingPunct="1">
+              <a:lnSpc>
+                <a:spcPct val="90000"/>
+              </a:lnSpc>
+              <a:spcBef>
+                <a:spcPts val="1000"/>
+              </a:spcBef>
+              <a:buFont typeface="Arial" panose="020B0604020202020204" pitchFamily="34" charset="0"/>
+              <a:buChar char="•"/>
+              <a:defRPr sz="2800" kern="1200">
+                <a:solidFill>
+                  <a:schemeClr val="tx1"/>
+                </a:solidFill>
+                <a:latin typeface="+mn-lt"/>
+                <a:ea typeface="+mn-ea"/>
+                <a:cs typeface="+mn-cs"/>
+              </a:defRPr>
+            </a:lvl1pPr>
+            <a:lvl2pPr marL="685800" indent="-228600" algn="l" defTabSz="914400" rtl="0" eaLnBrk="1" latinLnBrk="0" hangingPunct="1">
+              <a:lnSpc>
+                <a:spcPct val="90000"/>
+              </a:lnSpc>
+              <a:spcBef>
+                <a:spcPts val="500"/>
+              </a:spcBef>
+              <a:buFont typeface="Arial" panose="020B0604020202020204" pitchFamily="34" charset="0"/>
+              <a:buChar char="•"/>
+              <a:defRPr sz="2400" kern="1200">
+                <a:solidFill>
+                  <a:schemeClr val="tx1"/>
+                </a:solidFill>
+                <a:latin typeface="+mn-lt"/>
+                <a:ea typeface="+mn-ea"/>
+                <a:cs typeface="+mn-cs"/>
+              </a:defRPr>
+            </a:lvl2pPr>
+            <a:lvl3pPr marL="1143000" indent="-228600" algn="l" defTabSz="914400" rtl="0" eaLnBrk="1" latinLnBrk="0" hangingPunct="1">
+              <a:lnSpc>
+                <a:spcPct val="90000"/>
+              </a:lnSpc>
+              <a:spcBef>
+                <a:spcPts val="500"/>
+              </a:spcBef>
+              <a:buFont typeface="Arial" panose="020B0604020202020204" pitchFamily="34" charset="0"/>
+              <a:buChar char="•"/>
+              <a:defRPr sz="2000" kern="1200">
+                <a:solidFill>
+                  <a:schemeClr val="tx1"/>
+                </a:solidFill>
+                <a:latin typeface="+mn-lt"/>
+                <a:ea typeface="+mn-ea"/>
+                <a:cs typeface="+mn-cs"/>
+              </a:defRPr>
+            </a:lvl3pPr>
+            <a:lvl4pPr marL="1600200" indent="-228600" algn="l" defTabSz="914400" rtl="0" eaLnBrk="1" latinLnBrk="0" hangingPunct="1">
+              <a:lnSpc>
+                <a:spcPct val="90000"/>
+              </a:lnSpc>
+              <a:spcBef>
+                <a:spcPts val="500"/>
+              </a:spcBef>
+              <a:buFont typeface="Arial" panose="020B0604020202020204" pitchFamily="34" charset="0"/>
+              <a:buChar char="•"/>
+              <a:defRPr sz="1800" kern="1200">
+                <a:solidFill>
+                  <a:schemeClr val="tx1"/>
+                </a:solidFill>
+                <a:latin typeface="+mn-lt"/>
+                <a:ea typeface="+mn-ea"/>
+                <a:cs typeface="+mn-cs"/>
+              </a:defRPr>
+            </a:lvl4pPr>
+            <a:lvl5pPr marL="2057400" indent="-228600" algn="l" defTabSz="914400" rtl="0" eaLnBrk="1" latinLnBrk="0" hangingPunct="1">
+              <a:lnSpc>
+                <a:spcPct val="90000"/>
+              </a:lnSpc>
+              <a:spcBef>
+                <a:spcPts val="500"/>
+              </a:spcBef>
+              <a:buFont typeface="Arial" panose="020B0604020202020204" pitchFamily="34" charset="0"/>
+              <a:buChar char="•"/>
+              <a:defRPr sz="1800" kern="1200">
+                <a:solidFill>
+                  <a:schemeClr val="tx1"/>
+                </a:solidFill>
+                <a:latin typeface="+mn-lt"/>
+                <a:ea typeface="+mn-ea"/>
+                <a:cs typeface="+mn-cs"/>
+              </a:defRPr>
+            </a:lvl5pPr>
+            <a:lvl6pPr marL="2514600" indent="-228600" algn="l" defTabSz="914400" rtl="0" eaLnBrk="1" latinLnBrk="0" hangingPunct="1">
+              <a:lnSpc>
+                <a:spcPct val="90000"/>
+              </a:lnSpc>
+              <a:spcBef>
+                <a:spcPts val="500"/>
+              </a:spcBef>
+              <a:buFont typeface="Arial" panose="020B0604020202020204" pitchFamily="34" charset="0"/>
+              <a:buChar char="•"/>
+              <a:defRPr sz="1800" kern="1200">
+                <a:solidFill>
+                  <a:schemeClr val="tx1"/>
+                </a:solidFill>
+                <a:latin typeface="+mn-lt"/>
+                <a:ea typeface="+mn-ea"/>
+                <a:cs typeface="+mn-cs"/>
+              </a:defRPr>
+            </a:lvl6pPr>
+            <a:lvl7pPr marL="2971800" indent="-228600" algn="l" defTabSz="914400" rtl="0" eaLnBrk="1" latinLnBrk="0" hangingPunct="1">
+              <a:lnSpc>
+                <a:spcPct val="90000"/>
+              </a:lnSpc>
+              <a:spcBef>
+                <a:spcPts val="500"/>
+              </a:spcBef>
+              <a:buFont typeface="Arial" panose="020B0604020202020204" pitchFamily="34" charset="0"/>
+              <a:buChar char="•"/>
+              <a:defRPr sz="1800" kern="1200">
+                <a:solidFill>
+                  <a:schemeClr val="tx1"/>
+                </a:solidFill>
+                <a:latin typeface="+mn-lt"/>
+                <a:ea typeface="+mn-ea"/>
+                <a:cs typeface="+mn-cs"/>
+              </a:defRPr>
+            </a:lvl7pPr>
+            <a:lvl8pPr marL="3429000" indent="-228600" algn="l" defTabSz="914400" rtl="0" eaLnBrk="1" latinLnBrk="0" hangingPunct="1">
+              <a:lnSpc>
+                <a:spcPct val="90000"/>
+              </a:lnSpc>
+              <a:spcBef>
+                <a:spcPts val="500"/>
+              </a:spcBef>
+              <a:buFont typeface="Arial" panose="020B0604020202020204" pitchFamily="34" charset="0"/>
+              <a:buChar char="•"/>
+              <a:defRPr sz="1800" kern="1200">
+                <a:solidFill>
+                  <a:schemeClr val="tx1"/>
+                </a:solidFill>
+                <a:latin typeface="+mn-lt"/>
+                <a:ea typeface="+mn-ea"/>
+                <a:cs typeface="+mn-cs"/>
+              </a:defRPr>
+            </a:lvl8pPr>
+            <a:lvl9pPr marL="3886200" indent="-228600" algn="l" defTabSz="914400" rtl="0" eaLnBrk="1" latinLnBrk="0" hangingPunct="1">
+              <a:lnSpc>
+                <a:spcPct val="90000"/>
+              </a:lnSpc>
+              <a:spcBef>
+                <a:spcPts val="500"/>
+              </a:spcBef>
+              <a:buFont typeface="Arial" panose="020B0604020202020204" pitchFamily="34" charset="0"/>
+              <a:buChar char="•"/>
+              <a:defRPr sz="1800" kern="1200">
+                <a:solidFill>
+                  <a:schemeClr val="tx1"/>
+                </a:solidFill>
+                <a:latin typeface="+mn-lt"/>
+                <a:ea typeface="+mn-ea"/>
+                <a:cs typeface="+mn-cs"/>
+              </a:defRPr>
+            </a:lvl9pPr>
+          </a:lstStyle>
+          <a:p>
+            <a:pPr marL="457200" lvl="1" indent="0">
+              <a:lnSpc>
+                <a:spcPct val="100000"/>
+              </a:lnSpc>
+              <a:buNone/>
+            </a:pPr>
+            <a:r>
+              <a:rPr lang="en-US" sz="1400" dirty="0">
+                <a:solidFill>
+                  <a:schemeClr val="bg1"/>
+                </a:solidFill>
+              </a:rPr>
+              <a:t>SF 7 BW 500kHz Results</a:t>
+            </a:r>
+            <a:endParaRPr lang="en-US" sz="1100" dirty="0">
+              <a:solidFill>
+                <a:schemeClr val="bg1"/>
+              </a:solidFill>
+            </a:endParaRPr>
+          </a:p>
+          <a:p>
+            <a:pPr lvl="1">
+              <a:lnSpc>
+                <a:spcPct val="100000"/>
+              </a:lnSpc>
+            </a:pPr>
+            <a:endParaRPr lang="en-US" sz="1800" dirty="0">
+              <a:solidFill>
+                <a:schemeClr val="bg1"/>
+              </a:solidFill>
+            </a:endParaRPr>
+          </a:p>
           <a:p>
             <a:pPr marL="457200" lvl="1" indent="0">
               <a:buFont typeface="Arial" panose="020B0604020202020204" pitchFamily="34" charset="0"/>
@@ -8593,12 +9108,400 @@
           </a:p>
         </p:txBody>
       </p:sp>
+      <p:pic>
+        <p:nvPicPr>
+          <p:cNvPr id="3" name="Picture 2">
+            <a:extLst>
+              <a:ext uri="{FF2B5EF4-FFF2-40B4-BE49-F238E27FC236}">
+                <a16:creationId xmlns:a16="http://schemas.microsoft.com/office/drawing/2014/main" id="{DFBA563A-57BD-94A7-A6D2-F31452DDAA4F}"/>
+              </a:ext>
+            </a:extLst>
+          </p:cNvPr>
+          <p:cNvPicPr>
+            <a:picLocks noChangeAspect="1"/>
+          </p:cNvPicPr>
+          <p:nvPr/>
+        </p:nvPicPr>
+        <p:blipFill>
+          <a:blip r:embed="rId3"/>
+          <a:stretch>
+            <a:fillRect/>
+          </a:stretch>
+        </p:blipFill>
+        <p:spPr>
+          <a:xfrm>
+            <a:off x="2184401" y="4724943"/>
+            <a:ext cx="3428514" cy="1873099"/>
+          </a:xfrm>
+          <a:prstGeom prst="rect">
+            <a:avLst/>
+          </a:prstGeom>
+        </p:spPr>
+      </p:pic>
+      <p:pic>
+        <p:nvPicPr>
+          <p:cNvPr id="4" name="Picture 3">
+            <a:extLst>
+              <a:ext uri="{FF2B5EF4-FFF2-40B4-BE49-F238E27FC236}">
+                <a16:creationId xmlns:a16="http://schemas.microsoft.com/office/drawing/2014/main" id="{1C2DE0EE-4A9B-1C98-F5FB-B17EA0D36A4A}"/>
+              </a:ext>
+            </a:extLst>
+          </p:cNvPr>
+          <p:cNvPicPr>
+            <a:picLocks noChangeAspect="1"/>
+          </p:cNvPicPr>
+          <p:nvPr/>
+        </p:nvPicPr>
+        <p:blipFill>
+          <a:blip r:embed="rId4"/>
+          <a:stretch>
+            <a:fillRect/>
+          </a:stretch>
+        </p:blipFill>
+        <p:spPr>
+          <a:xfrm>
+            <a:off x="6784821" y="549007"/>
+            <a:ext cx="4476750" cy="1238250"/>
+          </a:xfrm>
+          <a:prstGeom prst="rect">
+            <a:avLst/>
+          </a:prstGeom>
+        </p:spPr>
+      </p:pic>
+      <p:graphicFrame>
+        <p:nvGraphicFramePr>
+          <p:cNvPr id="5" name="Table 4">
+            <a:extLst>
+              <a:ext uri="{FF2B5EF4-FFF2-40B4-BE49-F238E27FC236}">
+                <a16:creationId xmlns:a16="http://schemas.microsoft.com/office/drawing/2014/main" id="{2DC04C40-63F2-E430-1326-18D3513AD6BF}"/>
+              </a:ext>
+            </a:extLst>
+          </p:cNvPr>
+          <p:cNvGraphicFramePr>
+            <a:graphicFrameLocks noGrp="1"/>
+          </p:cNvGraphicFramePr>
+          <p:nvPr>
+            <p:extLst>
+              <p:ext uri="{D42A27DB-BD31-4B8C-83A1-F6EECF244321}">
+                <p14:modId xmlns:p14="http://schemas.microsoft.com/office/powerpoint/2010/main" val="3799697115"/>
+              </p:ext>
+            </p:extLst>
+          </p:nvPr>
+        </p:nvGraphicFramePr>
+        <p:xfrm>
+          <a:off x="5842905" y="2316480"/>
+          <a:ext cx="5418666" cy="2595880"/>
+        </p:xfrm>
+        <a:graphic>
+          <a:graphicData uri="http://schemas.openxmlformats.org/drawingml/2006/table">
+            <a:tbl>
+              <a:tblPr firstRow="1" bandRow="1">
+                <a:tableStyleId>{5C22544A-7EE6-4342-B048-85BDC9FD1C3A}</a:tableStyleId>
+              </a:tblPr>
+              <a:tblGrid>
+                <a:gridCol w="2709333">
+                  <a:extLst>
+                    <a:ext uri="{9D8B030D-6E8A-4147-A177-3AD203B41FA5}">
+                      <a16:colId xmlns:a16="http://schemas.microsoft.com/office/drawing/2014/main" val="673072292"/>
+                    </a:ext>
+                  </a:extLst>
+                </a:gridCol>
+                <a:gridCol w="2709333">
+                  <a:extLst>
+                    <a:ext uri="{9D8B030D-6E8A-4147-A177-3AD203B41FA5}">
+                      <a16:colId xmlns:a16="http://schemas.microsoft.com/office/drawing/2014/main" val="1273582494"/>
+                    </a:ext>
+                  </a:extLst>
+                </a:gridCol>
+              </a:tblGrid>
+              <a:tr h="370840">
+                <a:tc>
+                  <a:txBody>
+                    <a:bodyPr/>
+                    <a:lstStyle/>
+                    <a:p>
+                      <a:r>
+                        <a:rPr lang="en-US" dirty="0"/>
+                        <a:t>LoRa Config</a:t>
+                      </a:r>
+                    </a:p>
+                  </a:txBody>
+                  <a:tcPr/>
+                </a:tc>
+                <a:tc>
+                  <a:txBody>
+                    <a:bodyPr/>
+                    <a:lstStyle/>
+                    <a:p>
+                      <a:r>
+                        <a:rPr lang="en-US" dirty="0"/>
+                        <a:t>Starting Distance (X)</a:t>
+                      </a:r>
+                    </a:p>
+                  </a:txBody>
+                  <a:tcPr/>
+                </a:tc>
+                <a:extLst>
+                  <a:ext uri="{0D108BD9-81ED-4DB2-BD59-A6C34878D82A}">
+                    <a16:rowId xmlns:a16="http://schemas.microsoft.com/office/drawing/2014/main" val="91161164"/>
+                  </a:ext>
+                </a:extLst>
+              </a:tr>
+              <a:tr h="370840">
+                <a:tc>
+                  <a:txBody>
+                    <a:bodyPr/>
+                    <a:lstStyle/>
+                    <a:p>
+                      <a:r>
+                        <a:rPr lang="en-US" dirty="0"/>
+                        <a:t>SF 7 BW 10.4 kHz</a:t>
+                      </a:r>
+                    </a:p>
+                  </a:txBody>
+                  <a:tcPr/>
+                </a:tc>
+                <a:tc>
+                  <a:txBody>
+                    <a:bodyPr/>
+                    <a:lstStyle/>
+                    <a:p>
+                      <a:r>
+                        <a:rPr lang="en-US" dirty="0"/>
+                        <a:t>400 nm</a:t>
+                      </a:r>
+                    </a:p>
+                  </a:txBody>
+                  <a:tcPr/>
+                </a:tc>
+                <a:extLst>
+                  <a:ext uri="{0D108BD9-81ED-4DB2-BD59-A6C34878D82A}">
+                    <a16:rowId xmlns:a16="http://schemas.microsoft.com/office/drawing/2014/main" val="168584576"/>
+                  </a:ext>
+                </a:extLst>
+              </a:tr>
+              <a:tr h="370840">
+                <a:tc>
+                  <a:txBody>
+                    <a:bodyPr/>
+                    <a:lstStyle/>
+                    <a:p>
+                      <a:r>
+                        <a:rPr lang="en-US" dirty="0"/>
+                        <a:t>SF 7 BW 20 kHz</a:t>
+                      </a:r>
+                    </a:p>
+                  </a:txBody>
+                  <a:tcPr/>
+                </a:tc>
+                <a:tc>
+                  <a:txBody>
+                    <a:bodyPr/>
+                    <a:lstStyle/>
+                    <a:p>
+                      <a:r>
+                        <a:rPr lang="en-US" dirty="0"/>
+                        <a:t>480 nm</a:t>
+                      </a:r>
+                    </a:p>
+                  </a:txBody>
+                  <a:tcPr/>
+                </a:tc>
+                <a:extLst>
+                  <a:ext uri="{0D108BD9-81ED-4DB2-BD59-A6C34878D82A}">
+                    <a16:rowId xmlns:a16="http://schemas.microsoft.com/office/drawing/2014/main" val="4029904734"/>
+                  </a:ext>
+                </a:extLst>
+              </a:tr>
+              <a:tr h="370840">
+                <a:tc>
+                  <a:txBody>
+                    <a:bodyPr/>
+                    <a:lstStyle/>
+                    <a:p>
+                      <a:r>
+                        <a:rPr lang="en-US" dirty="0"/>
+                        <a:t>SF 7 BW 125 kHz</a:t>
+                      </a:r>
+                    </a:p>
+                  </a:txBody>
+                  <a:tcPr/>
+                </a:tc>
+                <a:tc>
+                  <a:txBody>
+                    <a:bodyPr/>
+                    <a:lstStyle/>
+                    <a:p>
+                      <a:r>
+                        <a:rPr lang="en-US" dirty="0"/>
+                        <a:t>390 nm</a:t>
+                      </a:r>
+                    </a:p>
+                  </a:txBody>
+                  <a:tcPr/>
+                </a:tc>
+                <a:extLst>
+                  <a:ext uri="{0D108BD9-81ED-4DB2-BD59-A6C34878D82A}">
+                    <a16:rowId xmlns:a16="http://schemas.microsoft.com/office/drawing/2014/main" val="1333985840"/>
+                  </a:ext>
+                </a:extLst>
+              </a:tr>
+              <a:tr h="370840">
+                <a:tc>
+                  <a:txBody>
+                    <a:bodyPr/>
+                    <a:lstStyle/>
+                    <a:p>
+                      <a:r>
+                        <a:rPr lang="en-US" dirty="0"/>
+                        <a:t>SF 7 BW 500 kHz</a:t>
+                      </a:r>
+                    </a:p>
+                  </a:txBody>
+                  <a:tcPr/>
+                </a:tc>
+                <a:tc>
+                  <a:txBody>
+                    <a:bodyPr/>
+                    <a:lstStyle/>
+                    <a:p>
+                      <a:r>
+                        <a:rPr lang="en-US" dirty="0"/>
+                        <a:t>160 nm</a:t>
+                      </a:r>
+                    </a:p>
+                  </a:txBody>
+                  <a:tcPr/>
+                </a:tc>
+                <a:extLst>
+                  <a:ext uri="{0D108BD9-81ED-4DB2-BD59-A6C34878D82A}">
+                    <a16:rowId xmlns:a16="http://schemas.microsoft.com/office/drawing/2014/main" val="4083095284"/>
+                  </a:ext>
+                </a:extLst>
+              </a:tr>
+              <a:tr h="370840">
+                <a:tc>
+                  <a:txBody>
+                    <a:bodyPr/>
+                    <a:lstStyle/>
+                    <a:p>
+                      <a:r>
+                        <a:rPr lang="en-US" dirty="0"/>
+                        <a:t>SF 12 BW 125 kHz</a:t>
+                      </a:r>
+                    </a:p>
+                  </a:txBody>
+                  <a:tcPr/>
+                </a:tc>
+                <a:tc>
+                  <a:txBody>
+                    <a:bodyPr/>
+                    <a:lstStyle/>
+                    <a:p>
+                      <a:r>
+                        <a:rPr lang="en-US" dirty="0"/>
+                        <a:t>500 nm</a:t>
+                      </a:r>
+                    </a:p>
+                  </a:txBody>
+                  <a:tcPr/>
+                </a:tc>
+                <a:extLst>
+                  <a:ext uri="{0D108BD9-81ED-4DB2-BD59-A6C34878D82A}">
+                    <a16:rowId xmlns:a16="http://schemas.microsoft.com/office/drawing/2014/main" val="4217983211"/>
+                  </a:ext>
+                </a:extLst>
+              </a:tr>
+              <a:tr h="370840">
+                <a:tc>
+                  <a:txBody>
+                    <a:bodyPr/>
+                    <a:lstStyle/>
+                    <a:p>
+                      <a:pPr marL="0" marR="0" lvl="0" indent="0" algn="l" defTabSz="914400" rtl="0" eaLnBrk="1" fontAlgn="auto" latinLnBrk="0" hangingPunct="1">
+                        <a:lnSpc>
+                          <a:spcPct val="100000"/>
+                        </a:lnSpc>
+                        <a:spcBef>
+                          <a:spcPts val="0"/>
+                        </a:spcBef>
+                        <a:spcAft>
+                          <a:spcPts val="0"/>
+                        </a:spcAft>
+                        <a:buClrTx/>
+                        <a:buSzTx/>
+                        <a:buFontTx/>
+                        <a:buNone/>
+                        <a:tabLst/>
+                        <a:defRPr/>
+                      </a:pPr>
+                      <a:r>
+                        <a:rPr lang="en-US" dirty="0"/>
+                        <a:t>SF 12 BW 500 kHz</a:t>
+                      </a:r>
+                    </a:p>
+                  </a:txBody>
+                  <a:tcPr/>
+                </a:tc>
+                <a:tc>
+                  <a:txBody>
+                    <a:bodyPr/>
+                    <a:lstStyle/>
+                    <a:p>
+                      <a:r>
+                        <a:rPr lang="en-US" dirty="0"/>
+                        <a:t> 480 nm</a:t>
+                      </a:r>
+                    </a:p>
+                  </a:txBody>
+                  <a:tcPr/>
+                </a:tc>
+                <a:extLst>
+                  <a:ext uri="{0D108BD9-81ED-4DB2-BD59-A6C34878D82A}">
+                    <a16:rowId xmlns:a16="http://schemas.microsoft.com/office/drawing/2014/main" val="793611026"/>
+                  </a:ext>
+                </a:extLst>
+              </a:tr>
+            </a:tbl>
+          </a:graphicData>
+        </a:graphic>
+      </p:graphicFrame>
+      <p:pic>
+        <p:nvPicPr>
+          <p:cNvPr id="7" name="Picture 6">
+            <a:extLst>
+              <a:ext uri="{FF2B5EF4-FFF2-40B4-BE49-F238E27FC236}">
+                <a16:creationId xmlns:a16="http://schemas.microsoft.com/office/drawing/2014/main" id="{5FB42AC4-FEA0-6A30-352F-41D0B937B09D}"/>
+              </a:ext>
+            </a:extLst>
+          </p:cNvPr>
+          <p:cNvPicPr>
+            <a:picLocks noChangeAspect="1"/>
+          </p:cNvPicPr>
+          <p:nvPr/>
+        </p:nvPicPr>
+        <p:blipFill>
+          <a:blip r:embed="rId5"/>
+          <a:stretch>
+            <a:fillRect/>
+          </a:stretch>
+        </p:blipFill>
+        <p:spPr>
+          <a:xfrm>
+            <a:off x="344413" y="2452342"/>
+            <a:ext cx="3986243" cy="1932232"/>
+          </a:xfrm>
+          <a:prstGeom prst="rect">
+            <a:avLst/>
+          </a:prstGeom>
+        </p:spPr>
+      </p:pic>
       <p:sp>
         <p:nvSpPr>
-          <p:cNvPr id="48" name="Content Placeholder 2">
-            <a:extLst>
-              <a:ext uri="{FF2B5EF4-FFF2-40B4-BE49-F238E27FC236}">
-                <a16:creationId xmlns:a16="http://schemas.microsoft.com/office/drawing/2014/main" id="{1914DEC5-5E96-C2C8-9083-1CE9E1001832}"/>
+          <p:cNvPr id="9" name="Content Placeholder 2">
+            <a:extLst>
+              <a:ext uri="{FF2B5EF4-FFF2-40B4-BE49-F238E27FC236}">
+                <a16:creationId xmlns:a16="http://schemas.microsoft.com/office/drawing/2014/main" id="{F2AFCC2A-52F7-E0A9-5F79-9BDD82F0F34E}"/>
               </a:ext>
             </a:extLst>
           </p:cNvPr>
@@ -8609,8 +9512,8 @@
         </p:nvSpPr>
         <p:spPr>
           <a:xfrm>
-            <a:off x="-24341" y="5935346"/>
-            <a:ext cx="4878585" cy="546736"/>
+            <a:off x="66473" y="2149366"/>
+            <a:ext cx="4048635" cy="434688"/>
           </a:xfrm>
           <a:prstGeom prst="rect">
             <a:avLst/>
@@ -8792,14 +9695,251 @@
               <a:buNone/>
             </a:pPr>
             <a:r>
-              <a:rPr lang="en-US" sz="2000" dirty="0">
+              <a:rPr lang="en-US" sz="1400" dirty="0">
                 <a:solidFill>
                   <a:schemeClr val="bg1"/>
                 </a:solidFill>
               </a:rPr>
-              <a:t>Comparison Waveform = -25 dB SNR</a:t>
+              <a:t>SF 7 BW 125kHz Results – Jam SNR greater?</a:t>
             </a:r>
-            <a:endParaRPr lang="en-US" sz="1600" dirty="0">
+            <a:endParaRPr lang="en-US" sz="1100" dirty="0">
+              <a:solidFill>
+                <a:schemeClr val="bg1"/>
+              </a:solidFill>
+            </a:endParaRPr>
+          </a:p>
+          <a:p>
+            <a:pPr lvl="1">
+              <a:lnSpc>
+                <a:spcPct val="100000"/>
+              </a:lnSpc>
+            </a:pPr>
+            <a:endParaRPr lang="en-US" sz="1800" dirty="0">
+              <a:solidFill>
+                <a:schemeClr val="bg1"/>
+              </a:solidFill>
+            </a:endParaRPr>
+          </a:p>
+          <a:p>
+            <a:pPr marL="457200" lvl="1" indent="0">
+              <a:buFont typeface="Arial" panose="020B0604020202020204" pitchFamily="34" charset="0"/>
+              <a:buNone/>
+            </a:pPr>
+            <a:endParaRPr lang="en-US" sz="2000" dirty="0">
+              <a:solidFill>
+                <a:schemeClr val="bg1"/>
+              </a:solidFill>
+            </a:endParaRPr>
+          </a:p>
+        </p:txBody>
+      </p:sp>
+      <p:sp>
+        <p:nvSpPr>
+          <p:cNvPr id="11" name="Content Placeholder 2">
+            <a:extLst>
+              <a:ext uri="{FF2B5EF4-FFF2-40B4-BE49-F238E27FC236}">
+                <a16:creationId xmlns:a16="http://schemas.microsoft.com/office/drawing/2014/main" id="{7ACB73F3-AFE6-767A-5A4F-BF28EC42F73C}"/>
+              </a:ext>
+            </a:extLst>
+          </p:cNvPr>
+          <p:cNvSpPr txBox="1">
+            <a:spLocks/>
+          </p:cNvSpPr>
+          <p:nvPr/>
+        </p:nvSpPr>
+        <p:spPr>
+          <a:xfrm>
+            <a:off x="1592026" y="4450227"/>
+            <a:ext cx="4290996" cy="434688"/>
+          </a:xfrm>
+          <a:prstGeom prst="rect">
+            <a:avLst/>
+          </a:prstGeom>
+        </p:spPr>
+        <p:txBody>
+          <a:bodyPr vert="horz" lIns="91440" tIns="45720" rIns="91440" bIns="45720" rtlCol="0">
+            <a:normAutofit fontScale="92500"/>
+          </a:bodyPr>
+          <a:lstStyle>
+            <a:lvl1pPr marL="228600" indent="-228600" algn="l" defTabSz="914400" rtl="0" eaLnBrk="1" latinLnBrk="0" hangingPunct="1">
+              <a:lnSpc>
+                <a:spcPct val="90000"/>
+              </a:lnSpc>
+              <a:spcBef>
+                <a:spcPts val="1000"/>
+              </a:spcBef>
+              <a:buFont typeface="Arial" panose="020B0604020202020204" pitchFamily="34" charset="0"/>
+              <a:buChar char="•"/>
+              <a:defRPr sz="2800" kern="1200">
+                <a:solidFill>
+                  <a:schemeClr val="tx1"/>
+                </a:solidFill>
+                <a:latin typeface="+mn-lt"/>
+                <a:ea typeface="+mn-ea"/>
+                <a:cs typeface="+mn-cs"/>
+              </a:defRPr>
+            </a:lvl1pPr>
+            <a:lvl2pPr marL="685800" indent="-228600" algn="l" defTabSz="914400" rtl="0" eaLnBrk="1" latinLnBrk="0" hangingPunct="1">
+              <a:lnSpc>
+                <a:spcPct val="90000"/>
+              </a:lnSpc>
+              <a:spcBef>
+                <a:spcPts val="500"/>
+              </a:spcBef>
+              <a:buFont typeface="Arial" panose="020B0604020202020204" pitchFamily="34" charset="0"/>
+              <a:buChar char="•"/>
+              <a:defRPr sz="2400" kern="1200">
+                <a:solidFill>
+                  <a:schemeClr val="tx1"/>
+                </a:solidFill>
+                <a:latin typeface="+mn-lt"/>
+                <a:ea typeface="+mn-ea"/>
+                <a:cs typeface="+mn-cs"/>
+              </a:defRPr>
+            </a:lvl2pPr>
+            <a:lvl3pPr marL="1143000" indent="-228600" algn="l" defTabSz="914400" rtl="0" eaLnBrk="1" latinLnBrk="0" hangingPunct="1">
+              <a:lnSpc>
+                <a:spcPct val="90000"/>
+              </a:lnSpc>
+              <a:spcBef>
+                <a:spcPts val="500"/>
+              </a:spcBef>
+              <a:buFont typeface="Arial" panose="020B0604020202020204" pitchFamily="34" charset="0"/>
+              <a:buChar char="•"/>
+              <a:defRPr sz="2000" kern="1200">
+                <a:solidFill>
+                  <a:schemeClr val="tx1"/>
+                </a:solidFill>
+                <a:latin typeface="+mn-lt"/>
+                <a:ea typeface="+mn-ea"/>
+                <a:cs typeface="+mn-cs"/>
+              </a:defRPr>
+            </a:lvl3pPr>
+            <a:lvl4pPr marL="1600200" indent="-228600" algn="l" defTabSz="914400" rtl="0" eaLnBrk="1" latinLnBrk="0" hangingPunct="1">
+              <a:lnSpc>
+                <a:spcPct val="90000"/>
+              </a:lnSpc>
+              <a:spcBef>
+                <a:spcPts val="500"/>
+              </a:spcBef>
+              <a:buFont typeface="Arial" panose="020B0604020202020204" pitchFamily="34" charset="0"/>
+              <a:buChar char="•"/>
+              <a:defRPr sz="1800" kern="1200">
+                <a:solidFill>
+                  <a:schemeClr val="tx1"/>
+                </a:solidFill>
+                <a:latin typeface="+mn-lt"/>
+                <a:ea typeface="+mn-ea"/>
+                <a:cs typeface="+mn-cs"/>
+              </a:defRPr>
+            </a:lvl4pPr>
+            <a:lvl5pPr marL="2057400" indent="-228600" algn="l" defTabSz="914400" rtl="0" eaLnBrk="1" latinLnBrk="0" hangingPunct="1">
+              <a:lnSpc>
+                <a:spcPct val="90000"/>
+              </a:lnSpc>
+              <a:spcBef>
+                <a:spcPts val="500"/>
+              </a:spcBef>
+              <a:buFont typeface="Arial" panose="020B0604020202020204" pitchFamily="34" charset="0"/>
+              <a:buChar char="•"/>
+              <a:defRPr sz="1800" kern="1200">
+                <a:solidFill>
+                  <a:schemeClr val="tx1"/>
+                </a:solidFill>
+                <a:latin typeface="+mn-lt"/>
+                <a:ea typeface="+mn-ea"/>
+                <a:cs typeface="+mn-cs"/>
+              </a:defRPr>
+            </a:lvl5pPr>
+            <a:lvl6pPr marL="2514600" indent="-228600" algn="l" defTabSz="914400" rtl="0" eaLnBrk="1" latinLnBrk="0" hangingPunct="1">
+              <a:lnSpc>
+                <a:spcPct val="90000"/>
+              </a:lnSpc>
+              <a:spcBef>
+                <a:spcPts val="500"/>
+              </a:spcBef>
+              <a:buFont typeface="Arial" panose="020B0604020202020204" pitchFamily="34" charset="0"/>
+              <a:buChar char="•"/>
+              <a:defRPr sz="1800" kern="1200">
+                <a:solidFill>
+                  <a:schemeClr val="tx1"/>
+                </a:solidFill>
+                <a:latin typeface="+mn-lt"/>
+                <a:ea typeface="+mn-ea"/>
+                <a:cs typeface="+mn-cs"/>
+              </a:defRPr>
+            </a:lvl6pPr>
+            <a:lvl7pPr marL="2971800" indent="-228600" algn="l" defTabSz="914400" rtl="0" eaLnBrk="1" latinLnBrk="0" hangingPunct="1">
+              <a:lnSpc>
+                <a:spcPct val="90000"/>
+              </a:lnSpc>
+              <a:spcBef>
+                <a:spcPts val="500"/>
+              </a:spcBef>
+              <a:buFont typeface="Arial" panose="020B0604020202020204" pitchFamily="34" charset="0"/>
+              <a:buChar char="•"/>
+              <a:defRPr sz="1800" kern="1200">
+                <a:solidFill>
+                  <a:schemeClr val="tx1"/>
+                </a:solidFill>
+                <a:latin typeface="+mn-lt"/>
+                <a:ea typeface="+mn-ea"/>
+                <a:cs typeface="+mn-cs"/>
+              </a:defRPr>
+            </a:lvl7pPr>
+            <a:lvl8pPr marL="3429000" indent="-228600" algn="l" defTabSz="914400" rtl="0" eaLnBrk="1" latinLnBrk="0" hangingPunct="1">
+              <a:lnSpc>
+                <a:spcPct val="90000"/>
+              </a:lnSpc>
+              <a:spcBef>
+                <a:spcPts val="500"/>
+              </a:spcBef>
+              <a:buFont typeface="Arial" panose="020B0604020202020204" pitchFamily="34" charset="0"/>
+              <a:buChar char="•"/>
+              <a:defRPr sz="1800" kern="1200">
+                <a:solidFill>
+                  <a:schemeClr val="tx1"/>
+                </a:solidFill>
+                <a:latin typeface="+mn-lt"/>
+                <a:ea typeface="+mn-ea"/>
+                <a:cs typeface="+mn-cs"/>
+              </a:defRPr>
+            </a:lvl8pPr>
+            <a:lvl9pPr marL="3886200" indent="-228600" algn="l" defTabSz="914400" rtl="0" eaLnBrk="1" latinLnBrk="0" hangingPunct="1">
+              <a:lnSpc>
+                <a:spcPct val="90000"/>
+              </a:lnSpc>
+              <a:spcBef>
+                <a:spcPts val="500"/>
+              </a:spcBef>
+              <a:buFont typeface="Arial" panose="020B0604020202020204" pitchFamily="34" charset="0"/>
+              <a:buChar char="•"/>
+              <a:defRPr sz="1800" kern="1200">
+                <a:solidFill>
+                  <a:schemeClr val="tx1"/>
+                </a:solidFill>
+                <a:latin typeface="+mn-lt"/>
+                <a:ea typeface="+mn-ea"/>
+                <a:cs typeface="+mn-cs"/>
+              </a:defRPr>
+            </a:lvl9pPr>
+          </a:lstStyle>
+          <a:p>
+            <a:pPr marL="457200" lvl="1" indent="0">
+              <a:lnSpc>
+                <a:spcPct val="100000"/>
+              </a:lnSpc>
+              <a:buNone/>
+            </a:pPr>
+            <a:r>
+              <a:rPr lang="en-US" sz="1400" dirty="0">
+                <a:solidFill>
+                  <a:schemeClr val="bg1"/>
+                </a:solidFill>
+              </a:rPr>
+              <a:t>SF 7 BW 10kHz Results – inconsistent, no falloff?</a:t>
+            </a:r>
+            <a:endParaRPr lang="en-US" sz="1100" dirty="0">
               <a:solidFill>
                 <a:schemeClr val="bg1"/>
               </a:solidFill>
